--- a/환경경제학/2026-1/환경경제학_Chapter_08.pptx
+++ b/환경경제학/2026-1/환경경제학_Chapter_08.pptx
@@ -244,7 +244,7 @@
           <a:p>
             <a:fld id="{4A5E00EF-AEA4-43E2-9451-8F9C59A39471}" type="datetimeFigureOut">
               <a:rPr lang="ko-KR" altLang="en-US" smtClean="0"/>
-              <a:t>2026-10-08</a:t>
+              <a:t>2026-10-14</a:t>
             </a:fld>
             <a:endParaRPr lang="ko-KR" altLang="en-US"/>
           </a:p>
@@ -666,7 +666,7 @@
           <a:p>
             <a:fld id="{CD32C56F-BD27-4999-9E6D-D4EACE3DA9F4}" type="datetime1">
               <a:rPr lang="ko-KR" altLang="en-US" smtClean="0"/>
-              <a:t>2026-10-08</a:t>
+              <a:t>2026-10-14</a:t>
             </a:fld>
             <a:endParaRPr lang="ko-KR" altLang="en-US"/>
           </a:p>
@@ -880,7 +880,7 @@
           <a:p>
             <a:fld id="{8EF4A19C-72C8-45CA-8E3F-68A7FA345D6C}" type="datetime1">
               <a:rPr lang="ko-KR" altLang="en-US" smtClean="0"/>
-              <a:t>2026-10-08</a:t>
+              <a:t>2026-10-14</a:t>
             </a:fld>
             <a:endParaRPr lang="ko-KR" altLang="en-US"/>
           </a:p>
@@ -1104,7 +1104,7 @@
           <a:p>
             <a:fld id="{56A175B2-010B-4341-954C-5F8F5C70B124}" type="datetime1">
               <a:rPr lang="ko-KR" altLang="en-US" smtClean="0"/>
-              <a:t>2026-10-08</a:t>
+              <a:t>2026-10-14</a:t>
             </a:fld>
             <a:endParaRPr lang="ko-KR" altLang="en-US"/>
           </a:p>
@@ -1318,7 +1318,7 @@
           <a:p>
             <a:fld id="{16B83F9E-22C9-45CA-9E85-070F1D3EF530}" type="datetime1">
               <a:rPr lang="ko-KR" altLang="en-US" smtClean="0"/>
-              <a:t>2026-10-08</a:t>
+              <a:t>2026-10-14</a:t>
             </a:fld>
             <a:endParaRPr lang="ko-KR" altLang="en-US"/>
           </a:p>
@@ -1609,7 +1609,7 @@
           <a:p>
             <a:fld id="{03278F45-FB3C-4C4D-B89A-7BC3F5F229F6}" type="datetime1">
               <a:rPr lang="ko-KR" altLang="en-US" smtClean="0"/>
-              <a:t>2026-10-08</a:t>
+              <a:t>2026-10-14</a:t>
             </a:fld>
             <a:endParaRPr lang="ko-KR" altLang="en-US"/>
           </a:p>
@@ -2002,7 +2002,7 @@
           <a:p>
             <a:fld id="{38FDAC3C-35A6-415C-9F03-738A6AC328B1}" type="datetime1">
               <a:rPr lang="ko-KR" altLang="en-US" smtClean="0"/>
-              <a:t>2026-10-08</a:t>
+              <a:t>2026-10-14</a:t>
             </a:fld>
             <a:endParaRPr lang="ko-KR" altLang="en-US"/>
           </a:p>
@@ -3596,7 +3596,7 @@
           <a:p>
             <a:fld id="{507A0DF1-AEE6-4B0D-89D2-351E7B3EF65C}" type="datetime1">
               <a:rPr lang="ko-KR" altLang="en-US" smtClean="0"/>
-              <a:t>2026-10-08</a:t>
+              <a:t>2026-10-14</a:t>
             </a:fld>
             <a:endParaRPr lang="ko-KR" altLang="en-US"/>
           </a:p>
@@ -4024,7 +4024,7 @@
           <a:p>
             <a:fld id="{CA93B8C9-630F-4D57-944D-04FD37CECCD3}" type="datetime1">
               <a:rPr lang="ko-KR" altLang="en-US" smtClean="0"/>
-              <a:t>2026-10-08</a:t>
+              <a:t>2026-10-14</a:t>
             </a:fld>
             <a:endParaRPr lang="ko-KR" altLang="en-US"/>
           </a:p>
@@ -4181,7 +4181,7 @@
           <a:p>
             <a:fld id="{E986165A-AC43-4902-9541-874ECD310BA3}" type="datetime1">
               <a:rPr lang="ko-KR" altLang="en-US" smtClean="0"/>
-              <a:t>2026-10-08</a:t>
+              <a:t>2026-10-14</a:t>
             </a:fld>
             <a:endParaRPr lang="ko-KR" altLang="en-US"/>
           </a:p>
@@ -4508,7 +4508,7 @@
           <a:p>
             <a:fld id="{47E6EE6D-2B0E-43A9-87A2-7354CDB998F4}" type="datetime1">
               <a:rPr lang="ko-KR" altLang="en-US" smtClean="0"/>
-              <a:t>2026-10-08</a:t>
+              <a:t>2026-10-14</a:t>
             </a:fld>
             <a:endParaRPr lang="ko-KR" altLang="en-US"/>
           </a:p>
@@ -4812,7 +4812,7 @@
           <a:p>
             <a:fld id="{5CC5944E-0BC8-4FAA-9F94-6B4B05834E10}" type="datetime1">
               <a:rPr lang="ko-KR" altLang="en-US" smtClean="0"/>
-              <a:t>2026-10-08</a:t>
+              <a:t>2026-10-14</a:t>
             </a:fld>
             <a:endParaRPr lang="ko-KR" altLang="en-US"/>
           </a:p>
@@ -25310,59 +25310,6 @@
               <a:t>이런 식의 오염원 간 상호감시가 이루어지면 정부의 감시 및 감독 필요성은 줄어든다</a:t>
             </a:r>
             <a:endParaRPr lang="en-US" altLang="ko-KR" sz="1600" spc="-50" dirty="0"/>
-          </a:p>
-        </p:txBody>
-      </p:sp>
-      <p:sp>
-        <p:nvSpPr>
-          <p:cNvPr id="6" name="TextBox 5">
-            <a:extLst>
-              <a:ext uri="{FF2B5EF4-FFF2-40B4-BE49-F238E27FC236}">
-                <a16:creationId xmlns:a16="http://schemas.microsoft.com/office/drawing/2014/main" id="{DFC792F5-FCB5-AB61-62F9-B5B194677DE9}"/>
-              </a:ext>
-            </a:extLst>
-          </p:cNvPr>
-          <p:cNvSpPr txBox="1"/>
-          <p:nvPr/>
-        </p:nvSpPr>
-        <p:spPr>
-          <a:xfrm>
-            <a:off x="4765996" y="5931984"/>
-            <a:ext cx="1974558" cy="443198"/>
-          </a:xfrm>
-          <a:prstGeom prst="rect">
-            <a:avLst/>
-          </a:prstGeom>
-          <a:noFill/>
-        </p:spPr>
-        <p:txBody>
-          <a:bodyPr wrap="square">
-            <a:spAutoFit/>
-          </a:bodyPr>
-          <a:lstStyle/>
-          <a:p>
-            <a:pPr>
-              <a:lnSpc>
-                <a:spcPct val="150000"/>
-              </a:lnSpc>
-            </a:pPr>
-            <a:r>
-              <a:rPr lang="ko-KR" altLang="en-US" sz="1800" u="sng" dirty="0">
-                <a:ln w="3175">
-                  <a:noFill/>
-                </a:ln>
-                <a:latin typeface="HY헤드라인M" panose="02030600000101010101" pitchFamily="18" charset="-127"/>
-                <a:ea typeface="HY헤드라인M" panose="02030600000101010101" pitchFamily="18" charset="-127"/>
-              </a:rPr>
-              <a:t>뒷장에 이어 계속</a:t>
-            </a:r>
-            <a:endParaRPr lang="en-US" altLang="ko-KR" sz="1800" u="sng" dirty="0">
-              <a:ln w="3175">
-                <a:noFill/>
-              </a:ln>
-              <a:latin typeface="HY헤드라인M" panose="02030600000101010101" pitchFamily="18" charset="-127"/>
-              <a:ea typeface="HY헤드라인M" panose="02030600000101010101" pitchFamily="18" charset="-127"/>
-            </a:endParaRPr>
           </a:p>
         </p:txBody>
       </p:sp>

--- a/환경경제학/2026-1/환경경제학_Chapter_08.pptx
+++ b/환경경제학/2026-1/환경경제학_Chapter_08.pptx
@@ -7765,13 +7765,13 @@
           <p:nvPr>
             <p:extLst>
               <p:ext uri="{D42A27DB-BD31-4B8C-83A1-F6EECF244321}">
-                <p14:modId xmlns:p14="http://schemas.microsoft.com/office/powerpoint/2010/main" val="3776111731"/>
+                <p14:modId xmlns:p14="http://schemas.microsoft.com/office/powerpoint/2010/main" val="560574226"/>
               </p:ext>
             </p:extLst>
           </p:nvPr>
         </p:nvGraphicFramePr>
         <p:xfrm>
-          <a:off x="2906860" y="5502183"/>
+          <a:off x="3371130" y="5531989"/>
           <a:ext cx="5449740" cy="983440"/>
         </p:xfrm>
         <a:graphic>
@@ -8614,6 +8614,50 @@
           </a:graphicData>
         </a:graphic>
       </p:graphicFrame>
+      <p:sp>
+        <p:nvSpPr>
+          <p:cNvPr id="7" name="TextBox 6">
+            <a:extLst>
+              <a:ext uri="{FF2B5EF4-FFF2-40B4-BE49-F238E27FC236}">
+                <a16:creationId xmlns:a16="http://schemas.microsoft.com/office/drawing/2014/main" id="{3B590F75-A5A6-7A17-50CE-118FEC712F72}"/>
+              </a:ext>
+            </a:extLst>
+          </p:cNvPr>
+          <p:cNvSpPr txBox="1"/>
+          <p:nvPr/>
+        </p:nvSpPr>
+        <p:spPr>
+          <a:xfrm>
+            <a:off x="1115438" y="5896751"/>
+            <a:ext cx="2176337" cy="276999"/>
+          </a:xfrm>
+          <a:prstGeom prst="rect">
+            <a:avLst/>
+          </a:prstGeom>
+          <a:noFill/>
+        </p:spPr>
+        <p:txBody>
+          <a:bodyPr wrap="square">
+            <a:spAutoFit/>
+          </a:bodyPr>
+          <a:lstStyle/>
+          <a:p>
+            <a:r>
+              <a:rPr lang="en-US" altLang="ko-KR" sz="1200" spc="-50" dirty="0"/>
+              <a:t>&lt;</a:t>
+            </a:r>
+            <a:r>
+              <a:rPr lang="ko-KR" altLang="en-US" sz="1200" spc="-50" dirty="0"/>
+              <a:t>두 피해지역 간의 전이계수</a:t>
+            </a:r>
+            <a:r>
+              <a:rPr lang="en-US" altLang="ko-KR" sz="1200" spc="-50" dirty="0"/>
+              <a:t>&gt;</a:t>
+            </a:r>
+            <a:endParaRPr lang="ko-KR" altLang="en-US" sz="1400" dirty="0"/>
+          </a:p>
+        </p:txBody>
+      </p:sp>
     </p:spTree>
     <p:extLst>
       <p:ext uri="{BB962C8B-B14F-4D97-AF65-F5344CB8AC3E}">
@@ -8716,13 +8760,13 @@
           <p:nvPr>
             <p:extLst>
               <p:ext uri="{D42A27DB-BD31-4B8C-83A1-F6EECF244321}">
-                <p14:modId xmlns:p14="http://schemas.microsoft.com/office/powerpoint/2010/main" val="1532575055"/>
+                <p14:modId xmlns:p14="http://schemas.microsoft.com/office/powerpoint/2010/main" val="4045481340"/>
               </p:ext>
             </p:extLst>
           </p:nvPr>
         </p:nvGraphicFramePr>
         <p:xfrm>
-          <a:off x="762244" y="3987801"/>
+          <a:off x="762244" y="4072106"/>
           <a:ext cx="9315206" cy="2214720"/>
         </p:xfrm>
         <a:graphic>
@@ -12154,6 +12198,50 @@
               <a:rPr lang="en-US" altLang="ko-KR" sz="1600" spc="-50" dirty="0"/>
               <a:t>.</a:t>
             </a:r>
+          </a:p>
+        </p:txBody>
+      </p:sp>
+      <p:sp>
+        <p:nvSpPr>
+          <p:cNvPr id="7" name="TextBox 6">
+            <a:extLst>
+              <a:ext uri="{FF2B5EF4-FFF2-40B4-BE49-F238E27FC236}">
+                <a16:creationId xmlns:a16="http://schemas.microsoft.com/office/drawing/2014/main" id="{A7F35143-0D3B-C60B-6989-FF5E34BAC7E0}"/>
+              </a:ext>
+            </a:extLst>
+          </p:cNvPr>
+          <p:cNvSpPr txBox="1"/>
+          <p:nvPr/>
+        </p:nvSpPr>
+        <p:spPr>
+          <a:xfrm>
+            <a:off x="4176408" y="3795107"/>
+            <a:ext cx="2176337" cy="276999"/>
+          </a:xfrm>
+          <a:prstGeom prst="rect">
+            <a:avLst/>
+          </a:prstGeom>
+          <a:noFill/>
+        </p:spPr>
+        <p:txBody>
+          <a:bodyPr wrap="square">
+            <a:spAutoFit/>
+          </a:bodyPr>
+          <a:lstStyle/>
+          <a:p>
+            <a:r>
+              <a:rPr lang="en-US" altLang="ko-KR" sz="1200" spc="-50" dirty="0"/>
+              <a:t>&lt;</a:t>
+            </a:r>
+            <a:r>
+              <a:rPr lang="ko-KR" altLang="en-US" sz="1200" spc="-50" dirty="0"/>
+              <a:t>온실가스의 종류</a:t>
+            </a:r>
+            <a:r>
+              <a:rPr lang="en-US" altLang="ko-KR" sz="1200" spc="-50" dirty="0"/>
+              <a:t>&gt;</a:t>
+            </a:r>
+            <a:endParaRPr lang="ko-KR" altLang="en-US" sz="1400" dirty="0"/>
           </a:p>
         </p:txBody>
       </p:sp>
@@ -14727,19 +14815,11 @@
             </a:pPr>
             <a:r>
               <a:rPr lang="ko-KR" altLang="en-US" sz="1600" spc="-50" dirty="0"/>
-              <a:t>직접규제 대신 오염도기준 </a:t>
-            </a:r>
-            <a:r>
-              <a:rPr lang="ko-KR" altLang="en-US" sz="1600" spc="-50" dirty="0" err="1"/>
-              <a:t>배출권거래제를</a:t>
-            </a:r>
-            <a:r>
-              <a:rPr lang="ko-KR" altLang="en-US" sz="1600" spc="-50" dirty="0"/>
-              <a:t> 사용하는 방법 </a:t>
-            </a:r>
-            <a:r>
-              <a:rPr lang="en-US" altLang="ko-KR" sz="1600" spc="-50" dirty="0"/>
-              <a:t>(APS, Ambient Permit System)</a:t>
+              <a:t>오염물질의 이질성에도 불구하고 배출량기준 거래제를 대신 사용하는 방법</a:t>
+            </a:r>
+            <a:r>
+              <a:rPr lang="en-US" altLang="ko-KR" sz="1600" spc="-50" dirty="0"/>
+              <a:t>(EPS, Emission Permit System)</a:t>
             </a:r>
           </a:p>
           <a:p>
@@ -14752,11 +14832,19 @@
             </a:pPr>
             <a:r>
               <a:rPr lang="ko-KR" altLang="en-US" sz="1600" spc="-50" dirty="0"/>
-              <a:t>오염물질의 이질성에도 불구하고 배출량기준 거래제를 대신 사용하는 방법</a:t>
-            </a:r>
-            <a:r>
-              <a:rPr lang="en-US" altLang="ko-KR" sz="1600" spc="-50" dirty="0"/>
-              <a:t>(EPS, Emission Permit System)</a:t>
+              <a:t>오염도기준 </a:t>
+            </a:r>
+            <a:r>
+              <a:rPr lang="ko-KR" altLang="en-US" sz="1600" spc="-50" dirty="0" err="1"/>
+              <a:t>배출권거래제를</a:t>
+            </a:r>
+            <a:r>
+              <a:rPr lang="ko-KR" altLang="en-US" sz="1600" spc="-50" dirty="0"/>
+              <a:t> 사용하는 방법 </a:t>
+            </a:r>
+            <a:r>
+              <a:rPr lang="en-US" altLang="ko-KR" sz="1600" spc="-50" dirty="0"/>
+              <a:t>(APS, Ambient Permit System)</a:t>
             </a:r>
           </a:p>
         </p:txBody>
@@ -28412,6 +28500,10 @@
               <a:buFont typeface="Wingdings" panose="05000000000000000000" pitchFamily="2" charset="2"/>
               <a:buChar char="ü"/>
             </a:pPr>
+            <a:r>
+              <a:rPr lang="ko-KR" altLang="en-US" sz="1600" spc="-50" dirty="0"/>
+              <a:t>예를 들어 </a:t>
+            </a:r>
             <a:r>
               <a:rPr lang="en-US" altLang="ko-KR" sz="1600" spc="-50" dirty="0"/>
               <a:t>A</a:t>
@@ -35409,11 +35501,11 @@
             </a:pPr>
             <a:r>
               <a:rPr lang="ko-KR" altLang="en-US" sz="1600" spc="-50" dirty="0"/>
-              <a:t>배출권이 오염도를 기준으로 설정되면 피해지역에 축적되는 오염물질의 양이 일정하게 고정되므로 배출량기준 거래제에서 </a:t>
+              <a:t>배출권이 오염도를 기준으로 설정되면 피해지역에 축적되는 오염물질의 양이 일정하게 고정되므로 배출량기준 </a:t>
             </a:r>
             <a:r>
               <a:rPr lang="ko-KR" altLang="en-US" sz="1600" spc="-50" dirty="0" err="1"/>
-              <a:t>처럼</a:t>
+              <a:t>거래제에서처럼</a:t>
             </a:r>
             <a:r>
               <a:rPr lang="ko-KR" altLang="en-US" sz="1600" spc="-50" dirty="0"/>
